--- a/MF0964_3 Desarrollo de elementos software para gestión de/JAVA/GESTIÓN DE LA INFORMACIÓN ALMACENADA EN FICHEROS/TEMA 1.pptx
+++ b/MF0964_3 Desarrollo de elementos software para gestión de/JAVA/GESTIÓN DE LA INFORMACIÓN ALMACENADA EN FICHEROS/TEMA 1.pptx
@@ -130,60 +130,6 @@
 
 <file path=ppt/changesInfos/changesInfo1.xml><?xml version="1.0" encoding="utf-8"?>
 <pc:chgInfo xmlns:a="http://schemas.openxmlformats.org/drawingml/2006/main" xmlns:r="http://schemas.openxmlformats.org/officeDocument/2006/relationships" xmlns:ac="http://schemas.microsoft.com/office/drawing/2013/main/command" xmlns:pc="http://schemas.microsoft.com/office/powerpoint/2013/main/command">
-  <pc:docChgLst>
-    <pc:chgData name="Alberto Ruiz" userId="47fa91d207cfb014" providerId="LiveId" clId="{C408ECC4-17FD-4C83-A584-A5F4EB628F93}"/>
-    <pc:docChg chg="modSld">
-      <pc:chgData name="Alberto Ruiz" userId="47fa91d207cfb014" providerId="LiveId" clId="{C408ECC4-17FD-4C83-A584-A5F4EB628F93}" dt="2024-10-01T16:12:29.566" v="2" actId="1076"/>
-      <pc:docMkLst>
-        <pc:docMk/>
-      </pc:docMkLst>
-      <pc:sldChg chg="modSp mod">
-        <pc:chgData name="Alberto Ruiz" userId="47fa91d207cfb014" providerId="LiveId" clId="{C408ECC4-17FD-4C83-A584-A5F4EB628F93}" dt="2024-10-01T16:10:19.604" v="0" actId="1076"/>
-        <pc:sldMkLst>
-          <pc:docMk/>
-          <pc:sldMk cId="661114220" sldId="262"/>
-        </pc:sldMkLst>
-        <pc:spChg chg="mod">
-          <ac:chgData name="Alberto Ruiz" userId="47fa91d207cfb014" providerId="LiveId" clId="{C408ECC4-17FD-4C83-A584-A5F4EB628F93}" dt="2024-10-01T16:10:19.604" v="0" actId="1076"/>
-          <ac:spMkLst>
-            <pc:docMk/>
-            <pc:sldMk cId="661114220" sldId="262"/>
-            <ac:spMk id="3" creationId="{6E924676-832B-2444-13B5-BEFA16D81175}"/>
-          </ac:spMkLst>
-        </pc:spChg>
-      </pc:sldChg>
-      <pc:sldChg chg="modSp mod">
-        <pc:chgData name="Alberto Ruiz" userId="47fa91d207cfb014" providerId="LiveId" clId="{C408ECC4-17FD-4C83-A584-A5F4EB628F93}" dt="2024-10-01T16:10:52.101" v="1" actId="1076"/>
-        <pc:sldMkLst>
-          <pc:docMk/>
-          <pc:sldMk cId="2734000950" sldId="264"/>
-        </pc:sldMkLst>
-        <pc:spChg chg="mod">
-          <ac:chgData name="Alberto Ruiz" userId="47fa91d207cfb014" providerId="LiveId" clId="{C408ECC4-17FD-4C83-A584-A5F4EB628F93}" dt="2024-10-01T16:10:52.101" v="1" actId="1076"/>
-          <ac:spMkLst>
-            <pc:docMk/>
-            <pc:sldMk cId="2734000950" sldId="264"/>
-            <ac:spMk id="3" creationId="{62DEB1D1-2AB8-B7F2-F66C-916B773EB872}"/>
-          </ac:spMkLst>
-        </pc:spChg>
-      </pc:sldChg>
-      <pc:sldChg chg="modSp mod">
-        <pc:chgData name="Alberto Ruiz" userId="47fa91d207cfb014" providerId="LiveId" clId="{C408ECC4-17FD-4C83-A584-A5F4EB628F93}" dt="2024-10-01T16:12:29.566" v="2" actId="1076"/>
-        <pc:sldMkLst>
-          <pc:docMk/>
-          <pc:sldMk cId="3607039528" sldId="270"/>
-        </pc:sldMkLst>
-        <pc:spChg chg="mod">
-          <ac:chgData name="Alberto Ruiz" userId="47fa91d207cfb014" providerId="LiveId" clId="{C408ECC4-17FD-4C83-A584-A5F4EB628F93}" dt="2024-10-01T16:12:29.566" v="2" actId="1076"/>
-          <ac:spMkLst>
-            <pc:docMk/>
-            <pc:sldMk cId="3607039528" sldId="270"/>
-            <ac:spMk id="4" creationId="{F6610C2F-8E37-A786-7586-EFA155767D7D}"/>
-          </ac:spMkLst>
-        </pc:spChg>
-      </pc:sldChg>
-    </pc:docChg>
-  </pc:docChgLst>
   <pc:docChgLst>
     <pc:chgData name="Alberto Ruiz" userId="47fa91d207cfb014" providerId="LiveId" clId="{DC7008C6-5601-4C55-B6BB-20F91776DDFE}"/>
     <pc:docChg chg="undo custSel addSld modSld addMainMaster delMainMaster">
@@ -989,6 +935,60 @@
       </pc:sldMasterChg>
     </pc:docChg>
   </pc:docChgLst>
+  <pc:docChgLst>
+    <pc:chgData name="Alberto Ruiz" userId="47fa91d207cfb014" providerId="LiveId" clId="{C408ECC4-17FD-4C83-A584-A5F4EB628F93}"/>
+    <pc:docChg chg="modSld">
+      <pc:chgData name="Alberto Ruiz" userId="47fa91d207cfb014" providerId="LiveId" clId="{C408ECC4-17FD-4C83-A584-A5F4EB628F93}" dt="2024-10-01T16:12:29.566" v="2" actId="1076"/>
+      <pc:docMkLst>
+        <pc:docMk/>
+      </pc:docMkLst>
+      <pc:sldChg chg="modSp mod">
+        <pc:chgData name="Alberto Ruiz" userId="47fa91d207cfb014" providerId="LiveId" clId="{C408ECC4-17FD-4C83-A584-A5F4EB628F93}" dt="2024-10-01T16:10:19.604" v="0" actId="1076"/>
+        <pc:sldMkLst>
+          <pc:docMk/>
+          <pc:sldMk cId="661114220" sldId="262"/>
+        </pc:sldMkLst>
+        <pc:spChg chg="mod">
+          <ac:chgData name="Alberto Ruiz" userId="47fa91d207cfb014" providerId="LiveId" clId="{C408ECC4-17FD-4C83-A584-A5F4EB628F93}" dt="2024-10-01T16:10:19.604" v="0" actId="1076"/>
+          <ac:spMkLst>
+            <pc:docMk/>
+            <pc:sldMk cId="661114220" sldId="262"/>
+            <ac:spMk id="3" creationId="{6E924676-832B-2444-13B5-BEFA16D81175}"/>
+          </ac:spMkLst>
+        </pc:spChg>
+      </pc:sldChg>
+      <pc:sldChg chg="modSp mod">
+        <pc:chgData name="Alberto Ruiz" userId="47fa91d207cfb014" providerId="LiveId" clId="{C408ECC4-17FD-4C83-A584-A5F4EB628F93}" dt="2024-10-01T16:10:52.101" v="1" actId="1076"/>
+        <pc:sldMkLst>
+          <pc:docMk/>
+          <pc:sldMk cId="2734000950" sldId="264"/>
+        </pc:sldMkLst>
+        <pc:spChg chg="mod">
+          <ac:chgData name="Alberto Ruiz" userId="47fa91d207cfb014" providerId="LiveId" clId="{C408ECC4-17FD-4C83-A584-A5F4EB628F93}" dt="2024-10-01T16:10:52.101" v="1" actId="1076"/>
+          <ac:spMkLst>
+            <pc:docMk/>
+            <pc:sldMk cId="2734000950" sldId="264"/>
+            <ac:spMk id="3" creationId="{62DEB1D1-2AB8-B7F2-F66C-916B773EB872}"/>
+          </ac:spMkLst>
+        </pc:spChg>
+      </pc:sldChg>
+      <pc:sldChg chg="modSp mod">
+        <pc:chgData name="Alberto Ruiz" userId="47fa91d207cfb014" providerId="LiveId" clId="{C408ECC4-17FD-4C83-A584-A5F4EB628F93}" dt="2024-10-01T16:12:29.566" v="2" actId="1076"/>
+        <pc:sldMkLst>
+          <pc:docMk/>
+          <pc:sldMk cId="3607039528" sldId="270"/>
+        </pc:sldMkLst>
+        <pc:spChg chg="mod">
+          <ac:chgData name="Alberto Ruiz" userId="47fa91d207cfb014" providerId="LiveId" clId="{C408ECC4-17FD-4C83-A584-A5F4EB628F93}" dt="2024-10-01T16:12:29.566" v="2" actId="1076"/>
+          <ac:spMkLst>
+            <pc:docMk/>
+            <pc:sldMk cId="3607039528" sldId="270"/>
+            <ac:spMk id="4" creationId="{F6610C2F-8E37-A786-7586-EFA155767D7D}"/>
+          </ac:spMkLst>
+        </pc:spChg>
+      </pc:sldChg>
+    </pc:docChg>
+  </pc:docChgLst>
 </pc:chgInfo>
 </file>
 
@@ -1148,7 +1148,7 @@
           <a:p>
             <a:fld id="{1C8322F6-1C60-46CF-968C-BC20E470F443}" type="datetimeFigureOut">
               <a:rPr lang="en-US" smtClean="0"/>
-              <a:t>10/1/2024</a:t>
+              <a:t>2/18/2026</a:t>
             </a:fld>
             <a:endParaRPr lang="en-US"/>
           </a:p>
@@ -1482,7 +1482,7 @@
           <a:p>
             <a:fld id="{1C8322F6-1C60-46CF-968C-BC20E470F443}" type="datetimeFigureOut">
               <a:rPr lang="en-US" smtClean="0"/>
-              <a:t>10/1/2024</a:t>
+              <a:t>2/18/2026</a:t>
             </a:fld>
             <a:endParaRPr lang="en-US"/>
           </a:p>
@@ -1735,7 +1735,7 @@
           <a:p>
             <a:fld id="{1C8322F6-1C60-46CF-968C-BC20E470F443}" type="datetimeFigureOut">
               <a:rPr lang="en-US" smtClean="0"/>
-              <a:t>10/1/2024</a:t>
+              <a:t>2/18/2026</a:t>
             </a:fld>
             <a:endParaRPr lang="en-US"/>
           </a:p>
@@ -2069,7 +2069,7 @@
           <a:p>
             <a:fld id="{1C8322F6-1C60-46CF-968C-BC20E470F443}" type="datetimeFigureOut">
               <a:rPr lang="en-US" smtClean="0"/>
-              <a:t>10/1/2024</a:t>
+              <a:t>2/18/2026</a:t>
             </a:fld>
             <a:endParaRPr lang="en-US"/>
           </a:p>
@@ -2350,7 +2350,7 @@
           <a:p>
             <a:fld id="{1C8322F6-1C60-46CF-968C-BC20E470F443}" type="datetimeFigureOut">
               <a:rPr lang="en-US" smtClean="0"/>
-              <a:t>10/1/2024</a:t>
+              <a:t>2/18/2026</a:t>
             </a:fld>
             <a:endParaRPr lang="en-US"/>
           </a:p>
@@ -2752,7 +2752,7 @@
           <a:p>
             <a:fld id="{1C8322F6-1C60-46CF-968C-BC20E470F443}" type="datetimeFigureOut">
               <a:rPr lang="en-US" smtClean="0"/>
-              <a:t>10/1/2024</a:t>
+              <a:t>2/18/2026</a:t>
             </a:fld>
             <a:endParaRPr lang="en-US"/>
           </a:p>
@@ -3213,7 +3213,7 @@
           <a:p>
             <a:fld id="{1C8322F6-1C60-46CF-968C-BC20E470F443}" type="datetimeFigureOut">
               <a:rPr lang="en-US" smtClean="0"/>
-              <a:t>10/1/2024</a:t>
+              <a:t>2/18/2026</a:t>
             </a:fld>
             <a:endParaRPr lang="en-US"/>
           </a:p>
@@ -3446,7 +3446,7 @@
           <a:p>
             <a:fld id="{1C8322F6-1C60-46CF-968C-BC20E470F443}" type="datetimeFigureOut">
               <a:rPr lang="en-US" smtClean="0"/>
-              <a:t>10/1/2024</a:t>
+              <a:t>2/18/2026</a:t>
             </a:fld>
             <a:endParaRPr lang="en-US"/>
           </a:p>
@@ -3645,7 +3645,7 @@
           <a:p>
             <a:fld id="{1C8322F6-1C60-46CF-968C-BC20E470F443}" type="datetimeFigureOut">
               <a:rPr lang="en-US" smtClean="0"/>
-              <a:t>10/1/2024</a:t>
+              <a:t>2/18/2026</a:t>
             </a:fld>
             <a:endParaRPr lang="en-US"/>
           </a:p>
@@ -3958,7 +3958,7 @@
           <a:p>
             <a:fld id="{1C8322F6-1C60-46CF-968C-BC20E470F443}" type="datetimeFigureOut">
               <a:rPr lang="en-US" smtClean="0"/>
-              <a:t>10/1/2024</a:t>
+              <a:t>2/18/2026</a:t>
             </a:fld>
             <a:endParaRPr lang="en-US"/>
           </a:p>
@@ -4422,7 +4422,7 @@
           <a:p>
             <a:fld id="{1C8322F6-1C60-46CF-968C-BC20E470F443}" type="datetimeFigureOut">
               <a:rPr lang="en-US" smtClean="0"/>
-              <a:t>10/1/2024</a:t>
+              <a:t>2/18/2026</a:t>
             </a:fld>
             <a:endParaRPr lang="en-US"/>
           </a:p>
@@ -4835,7 +4835,7 @@
           <a:p>
             <a:fld id="{1C8322F6-1C60-46CF-968C-BC20E470F443}" type="datetimeFigureOut">
               <a:rPr lang="en-US" smtClean="0"/>
-              <a:t>10/1/2024</a:t>
+              <a:t>2/18/2026</a:t>
             </a:fld>
             <a:endParaRPr lang="en-US"/>
           </a:p>
@@ -10668,7 +10668,7 @@
         </p:nvSpPr>
         <p:spPr>
           <a:xfrm>
-            <a:off x="180976" y="628650"/>
+            <a:off x="511176" y="1155700"/>
             <a:ext cx="11450336" cy="6035360"/>
           </a:xfrm>
         </p:spPr>
@@ -11861,7 +11861,7 @@
         </p:nvSpPr>
         <p:spPr>
           <a:xfrm>
-            <a:off x="247651" y="752476"/>
+            <a:off x="711201" y="752476"/>
             <a:ext cx="11839574" cy="5997260"/>
           </a:xfrm>
         </p:spPr>
